--- a/apps/resources/bundled_files/2-klass-figuralar-sabak.pptx
+++ b/apps/resources/bundled_files/2-klass-figuralar-sabak.pptx
@@ -5196,7 +5196,7 @@
                 </a:solidFill>
                 <a:latin typeface="PT Sans"/>
               </a:rPr>
-              <a:t>2-класс · Математика</a:t>
+              <a:t/>
             </a:r>
           </a:p>
         </p:txBody>
@@ -5400,7 +5400,7 @@
                 </a:solidFill>
                 <a:latin typeface="PT Sans"/>
               </a:rPr>
-              <a:t>Китеп: 2025–26 КТП, 2-класс (Cambridge 2): «2D/3D фигуралар»; 2011-стандарт 2.1.5 (тик бурчтук, квадрат). Кыргызча окуу китеби папкада жок; мазмуну толук жаңы.</a:t>
+              <a:t>Китеп: 2025–26 КТП, 2-класс: «2D/3D фигуралар»; 2011-стандарт 2.1.5 (тик бурчтук, квадрат). Кыргызча окуу китеби папкада жок; мазмуну толук жаңы.</a:t>
             </a:r>
           </a:p>
         </p:txBody>
@@ -5688,7 +5688,7 @@
                 </a:solidFill>
                 <a:latin typeface="PT Sans"/>
               </a:rPr>
-              <a:t>2-класс ›</a:t>
+              <a:t/>
             </a:r>
           </a:p>
           <a:p>
@@ -7853,7 +7853,7 @@
                 </a:solidFill>
                 <a:latin typeface="PT Sans"/>
               </a:rPr>
-              <a:t>2-класс ›</a:t>
+              <a:t/>
             </a:r>
           </a:p>
           <a:p>
@@ -10225,7 +10225,7 @@
                 </a:solidFill>
                 <a:latin typeface="PT Sans"/>
               </a:rPr>
-              <a:t>2-класс ›</a:t>
+              <a:t/>
             </a:r>
           </a:p>
           <a:p>
@@ -14430,7 +14430,7 @@
                 </a:solidFill>
                 <a:latin typeface="PT Sans"/>
               </a:rPr>
-              <a:t>2-класс ›</a:t>
+              <a:t/>
             </a:r>
           </a:p>
           <a:p>
@@ -16013,7 +16013,7 @@
                 </a:solidFill>
                 <a:latin typeface="PT Sans"/>
               </a:rPr>
-              <a:t>2-класс ›</a:t>
+              <a:t/>
             </a:r>
           </a:p>
           <a:p>
@@ -17405,7 +17405,7 @@
                 </a:solidFill>
                 <a:latin typeface="PT Sans"/>
               </a:rPr>
-              <a:t>2-класс ›</a:t>
+              <a:t/>
             </a:r>
           </a:p>
           <a:p>
@@ -18927,7 +18927,7 @@
                 </a:solidFill>
                 <a:latin typeface="PT Sans"/>
               </a:rPr>
-              <a:t>2-класс ›</a:t>
+              <a:t/>
             </a:r>
           </a:p>
           <a:p>
@@ -20671,7 +20671,7 @@
                 </a:solidFill>
                 <a:latin typeface="PT Sans"/>
               </a:rPr>
-              <a:t>2-класс ›</a:t>
+              <a:t/>
             </a:r>
           </a:p>
           <a:p>
@@ -22379,7 +22379,7 @@
                 </a:solidFill>
                 <a:latin typeface="PT Sans"/>
               </a:rPr>
-              <a:t>2-класс ›</a:t>
+              <a:t/>
             </a:r>
           </a:p>
           <a:p>
@@ -23909,7 +23909,7 @@
                 </a:solidFill>
                 <a:latin typeface="PT Sans"/>
               </a:rPr>
-              <a:t>2-класс ›</a:t>
+              <a:t/>
             </a:r>
           </a:p>
           <a:p>
@@ -25591,7 +25591,7 @@
                 </a:solidFill>
                 <a:latin typeface="PT Sans"/>
               </a:rPr>
-              <a:t>2-класс ›</a:t>
+              <a:t/>
             </a:r>
           </a:p>
           <a:p>
@@ -26868,7 +26868,7 @@
                 </a:solidFill>
                 <a:latin typeface="PT Sans"/>
               </a:rPr>
-              <a:t>2-класс ›</a:t>
+              <a:t/>
             </a:r>
           </a:p>
           <a:p>
@@ -28436,7 +28436,7 @@
                 </a:solidFill>
                 <a:latin typeface="PT Sans"/>
               </a:rPr>
-              <a:t>2-класс ›</a:t>
+              <a:t/>
             </a:r>
           </a:p>
           <a:p>
@@ -29892,7 +29892,7 @@
                 </a:solidFill>
                 <a:latin typeface="PT Sans"/>
               </a:rPr>
-              <a:t>2-класс ›</a:t>
+              <a:t/>
             </a:r>
           </a:p>
           <a:p>
@@ -31016,7 +31016,7 @@
                 </a:solidFill>
                 <a:latin typeface="PT Sans"/>
               </a:rPr>
-              <a:t>2-класс ›</a:t>
+              <a:t/>
             </a:r>
           </a:p>
           <a:p>
@@ -31816,7 +31816,7 @@
                 </a:solidFill>
                 <a:latin typeface="PT Sans"/>
               </a:rPr>
-              <a:t>2-класс ›</a:t>
+              <a:t/>
             </a:r>
           </a:p>
           <a:p>
@@ -33351,7 +33351,7 @@
                 </a:solidFill>
                 <a:latin typeface="PT Sans"/>
               </a:rPr>
-              <a:t>2-класс ›</a:t>
+              <a:t/>
             </a:r>
           </a:p>
           <a:p>
@@ -34300,7 +34300,7 @@
                 </a:solidFill>
                 <a:latin typeface="PT Sans"/>
               </a:rPr>
-              <a:t>2-класс ›</a:t>
+              <a:t/>
             </a:r>
           </a:p>
           <a:p>
@@ -35754,7 +35754,7 @@
                 </a:solidFill>
                 <a:latin typeface="PT Sans"/>
               </a:rPr>
-              <a:t>2-класс ›</a:t>
+              <a:t/>
             </a:r>
           </a:p>
           <a:p>
@@ -36500,7 +36500,7 @@
                 </a:solidFill>
                 <a:latin typeface="PT Sans"/>
               </a:rPr>
-              <a:t>2-класс ›</a:t>
+              <a:t/>
             </a:r>
           </a:p>
           <a:p>
@@ -37308,7 +37308,7 @@
                 </a:solidFill>
                 <a:latin typeface="PT Sans"/>
               </a:rPr>
-              <a:t>2-класс ›</a:t>
+              <a:t/>
             </a:r>
           </a:p>
           <a:p>
@@ -38499,7 +38499,7 @@
                 </a:solidFill>
                 <a:latin typeface="PT Sans"/>
               </a:rPr>
-              <a:t>2-класс ›</a:t>
+              <a:t/>
             </a:r>
           </a:p>
           <a:p>
@@ -39694,7 +39694,7 @@
                 </a:solidFill>
                 <a:latin typeface="PT Sans"/>
               </a:rPr>
-              <a:t>2-класс ›</a:t>
+              <a:t/>
             </a:r>
           </a:p>
           <a:p>
@@ -39875,7 +39875,7 @@
                 </a:solidFill>
                 <a:latin typeface="PT Sans"/>
               </a:rPr>
-              <a:t>1-класс</a:t>
+              <a:t/>
             </a:r>
           </a:p>
         </p:txBody>
@@ -40055,7 +40055,7 @@
                 </a:solidFill>
                 <a:latin typeface="PT Sans"/>
               </a:rPr>
-              <a:t>2-класс</a:t>
+              <a:t/>
             </a:r>
           </a:p>
         </p:txBody>
@@ -40291,7 +40291,7 @@
                 </a:solidFill>
                 <a:latin typeface="PT Sans"/>
               </a:rPr>
-              <a:t>3-класс</a:t>
+              <a:t/>
             </a:r>
           </a:p>
         </p:txBody>
@@ -40472,7 +40472,7 @@
                 </a:solidFill>
                 <a:latin typeface="PT Sans"/>
               </a:rPr>
-              <a:t>4-класс</a:t>
+              <a:t/>
             </a:r>
           </a:p>
         </p:txBody>
@@ -40892,7 +40892,7 @@
                 </a:solidFill>
                 <a:latin typeface="PT Sans"/>
               </a:rPr>
-              <a:t>2-класс ›</a:t>
+              <a:t/>
             </a:r>
           </a:p>
           <a:p>
@@ -42040,7 +42040,7 @@
                 </a:solidFill>
                 <a:latin typeface="PT Sans"/>
               </a:rPr>
-              <a:t>2-класс ›</a:t>
+              <a:t/>
             </a:r>
           </a:p>
           <a:p>

--- a/apps/resources/bundled_files/2-klass-figuralar-sabak.pptx
+++ b/apps/resources/bundled_files/2-klass-figuralar-sabak.pptx
@@ -1582,7 +1582,7 @@
           <a:lstStyle/>
           <a:p>
             <a:r>
-              <a:t>Ой жүгүртүү маданияты (Wenxi Lee, 2.6).</a:t>
+              <a:t>Ой жүгүртүү маданияты (Wenxi Lee, 2,6).</a:t>
             </a:r>
           </a:p>
         </p:txBody>
